--- a/Materials/1440-1500_Oyama/Rの頑健なコードを書くにはどのような工夫が必要か.pptx
+++ b/Materials/1440-1500_Oyama/Rの頑健なコードを書くにはどのような工夫が必要か.pptx
@@ -73,7 +73,7 @@
 <file path=ppt/revisionInfo.xml><?xml version="1.0" encoding="utf-8"?>
 <p1510:revInfo xmlns:a="http://schemas.openxmlformats.org/drawingml/2006/main" xmlns:r="http://schemas.openxmlformats.org/officeDocument/2006/relationships" xmlns:p1510="http://schemas.microsoft.com/office/powerpoint/2015/10/main">
   <p1510:revLst>
-    <p1510:client id="{F967538D-A343-4B60-B3AD-6AE269DB1D99}" v="11" dt="2026-03-24T10:09:37.927"/>
+    <p1510:client id="{F967538D-A343-4B60-B3AD-6AE269DB1D99}" v="13" dt="2026-04-02T10:01:22.890"/>
   </p1510:revLst>
 </p1510:revInfo>
 </file>
@@ -160,7 +160,7 @@
           <a:p>
             <a:fld id="{466EDA11-FB64-E74C-B19E-49156B88425C}" type="datetimeFigureOut">
               <a:rPr kumimoji="1" lang="ja-JP" altLang="en-US" smtClean="0"/>
-              <a:t>2026/3/24</a:t>
+              <a:t>2026/4/2</a:t>
             </a:fld>
             <a:endParaRPr kumimoji="1" lang="ja-JP" altLang="en-US"/>
           </a:p>
@@ -10208,7 +10208,7 @@
             </a:r>
             <a:r>
               <a:rPr kumimoji="1" lang="ja-JP" altLang="en-US" dirty="0"/>
-              <a:t>型のデータの数値型への変換はひとまず文字型に変換してから</a:t>
+              <a:t>型→数値型の変換はひとまず文字型に変換してから</a:t>
             </a:r>
           </a:p>
         </p:txBody>
@@ -10262,7 +10262,7 @@
         <p:spPr>
           <a:xfrm>
             <a:off x="496885" y="1426912"/>
-            <a:ext cx="13745207" cy="4493538"/>
+            <a:ext cx="13745207" cy="3985706"/>
           </a:xfrm>
         </p:spPr>
         <p:txBody>
@@ -10328,14 +10328,8 @@
             </a:r>
             <a:r>
               <a:rPr kumimoji="1" lang="ja-JP" altLang="en-US" sz="2800" b="0" dirty="0"/>
-              <a:t>型に設定されてしまっているデータを数値として扱うには、一度文字型に変換することに留意</a:t>
-            </a:r>
-            <a:endParaRPr kumimoji="1" lang="en-US" altLang="ja-JP" sz="2800" b="0" dirty="0"/>
-          </a:p>
-          <a:p>
-            <a:pPr marL="0" indent="0">
-              <a:buNone/>
-            </a:pPr>
+              <a:t>型に設定されてしまっているデータを数値として扱うには、一度文字型に変換する</a:t>
+            </a:r>
             <a:endParaRPr kumimoji="1" lang="en-US" altLang="ja-JP" sz="2800" b="0" dirty="0"/>
           </a:p>
           <a:p>
@@ -14195,7 +14189,7 @@
         <p:spPr>
           <a:xfrm>
             <a:off x="720000" y="1328057"/>
-            <a:ext cx="12964478" cy="5001369"/>
+            <a:ext cx="12964478" cy="6017032"/>
           </a:xfrm>
         </p:spPr>
         <p:txBody>
@@ -14211,17 +14205,7 @@
             </a:r>
             <a:r>
               <a:rPr kumimoji="1" lang="ja-JP" altLang="en-US" sz="2800" b="0" dirty="0"/>
-              <a:t>プログラムを動かす機会が増えたが、意図通りに処理されているか不安を感じた</a:t>
-            </a:r>
-            <a:endParaRPr kumimoji="1" lang="en-US" altLang="ja-JP" sz="2800" b="0" dirty="0"/>
-          </a:p>
-          <a:p>
-            <a:pPr marL="0" indent="0">
-              <a:buNone/>
-            </a:pPr>
-            <a:r>
-              <a:rPr kumimoji="1" lang="ja-JP" altLang="en-US" sz="2800" b="0" dirty="0"/>
-              <a:t>→ 頑健なプログラムを書きたい</a:t>
+              <a:t>プログラムを動かす機会が増えたが、意図通りに処理されているか不安</a:t>
             </a:r>
             <a:endParaRPr kumimoji="1" lang="en-US" altLang="ja-JP" sz="2800" b="0" dirty="0"/>
           </a:p>
@@ -14235,18 +14219,6 @@
             <a:pPr marL="0" indent="0">
               <a:buNone/>
             </a:pPr>
-            <a:r>
-              <a:rPr kumimoji="1" lang="ja-JP" altLang="en-US" sz="2800" b="0" dirty="0"/>
-              <a:t>＜頑健な</a:t>
-            </a:r>
-            <a:r>
-              <a:rPr kumimoji="1" lang="en-US" altLang="ja-JP" sz="2800" b="0" dirty="0"/>
-              <a:t>R</a:t>
-            </a:r>
-            <a:r>
-              <a:rPr kumimoji="1" lang="ja-JP" altLang="en-US" sz="2800" b="0" dirty="0"/>
-              <a:t>プログラムの例＞</a:t>
-            </a:r>
             <a:endParaRPr kumimoji="1" lang="en-US" altLang="ja-JP" sz="2800" b="0" dirty="0"/>
           </a:p>
           <a:p>
@@ -14255,7 +14227,7 @@
             </a:pPr>
             <a:r>
               <a:rPr kumimoji="1" lang="ja-JP" altLang="en-US" sz="2800" b="0" dirty="0"/>
-              <a:t>・ 想定外のデータが入ってきた場合にも意図通りの処理または手当てができる</a:t>
+              <a:t>　　　</a:t>
             </a:r>
             <a:endParaRPr kumimoji="1" lang="en-US" altLang="ja-JP" sz="2800" b="0" dirty="0"/>
           </a:p>
@@ -14265,7 +14237,7 @@
             </a:pPr>
             <a:r>
               <a:rPr kumimoji="1" lang="ja-JP" altLang="en-US" sz="2800" b="0" dirty="0"/>
-              <a:t>・ 実行環境を変えても意図通りの処理になる</a:t>
+              <a:t>　　　　　　　　　　</a:t>
             </a:r>
             <a:endParaRPr kumimoji="1" lang="en-US" altLang="ja-JP" sz="2800" b="0" dirty="0"/>
           </a:p>
@@ -14274,10 +14246,18 @@
               <a:buNone/>
             </a:pPr>
             <a:r>
-              <a:rPr kumimoji="1" lang="ja-JP" altLang="en-US" sz="2800" b="0" dirty="0"/>
-              <a:t>・ バージョンが変わっても意図通りの処理になる</a:t>
-            </a:r>
-            <a:endParaRPr kumimoji="1" lang="en-US" altLang="ja-JP" sz="2800" b="0" dirty="0"/>
+              <a:rPr kumimoji="1" lang="ja-JP" altLang="en-US" sz="2800" b="0" u="sng" dirty="0"/>
+              <a:t>頑健な</a:t>
+            </a:r>
+            <a:r>
+              <a:rPr kumimoji="1" lang="en-US" altLang="ja-JP" sz="2800" b="0" u="sng" dirty="0"/>
+              <a:t>R</a:t>
+            </a:r>
+            <a:r>
+              <a:rPr kumimoji="1" lang="ja-JP" altLang="en-US" sz="2800" b="0" u="sng" dirty="0"/>
+              <a:t>プログラムの例</a:t>
+            </a:r>
+            <a:endParaRPr kumimoji="1" lang="en-US" altLang="ja-JP" sz="2800" b="0" u="sng" dirty="0"/>
           </a:p>
           <a:p>
             <a:pPr marL="0" indent="0">
@@ -14285,7 +14265,7 @@
             </a:pPr>
             <a:r>
               <a:rPr kumimoji="1" lang="ja-JP" altLang="en-US" sz="2800" b="0" dirty="0"/>
-              <a:t>・ 処理が意図通りでない場合には検知できる</a:t>
+              <a:t>　・ 想定外のデータが入ってきた場合にも意図通りの処理または手当てができる</a:t>
             </a:r>
             <a:endParaRPr kumimoji="1" lang="en-US" altLang="ja-JP" sz="2800" b="0" dirty="0"/>
           </a:p>
@@ -14295,15 +14275,156 @@
             </a:pPr>
             <a:r>
               <a:rPr kumimoji="1" lang="ja-JP" altLang="en-US" sz="2800" b="0" dirty="0"/>
-              <a:t>・ 可読である（他プログラマーも問題なく流用・メンテナンスできる）</a:t>
+              <a:t>　・ 実行環境を変えても意図通りの処理になる</a:t>
             </a:r>
             <a:endParaRPr kumimoji="1" lang="en-US" altLang="ja-JP" sz="2800" b="0" dirty="0"/>
+          </a:p>
+          <a:p>
+            <a:pPr marL="0" indent="0">
+              <a:buNone/>
+            </a:pPr>
+            <a:r>
+              <a:rPr kumimoji="1" lang="ja-JP" altLang="en-US" sz="2800" b="0" dirty="0"/>
+              <a:t>　・ バージョンが変わっても意図通りの処理になる</a:t>
+            </a:r>
+            <a:endParaRPr kumimoji="1" lang="en-US" altLang="ja-JP" sz="2800" b="0" dirty="0"/>
+          </a:p>
+          <a:p>
+            <a:pPr marL="0" indent="0">
+              <a:buNone/>
+            </a:pPr>
+            <a:r>
+              <a:rPr kumimoji="1" lang="ja-JP" altLang="en-US" sz="2800" b="0" dirty="0"/>
+              <a:t>　・ 処理が意図通りでない場合には検知できる</a:t>
+            </a:r>
+            <a:endParaRPr kumimoji="1" lang="en-US" altLang="ja-JP" sz="2800" b="0" dirty="0"/>
+          </a:p>
+          <a:p>
+            <a:pPr marL="0" indent="0">
+              <a:buNone/>
+            </a:pPr>
+            <a:r>
+              <a:rPr kumimoji="1" lang="ja-JP" altLang="en-US" sz="2800" b="0" dirty="0"/>
+              <a:t>　・ 可読である</a:t>
+            </a:r>
+            <a:r>
+              <a:rPr kumimoji="1" lang="en-US" altLang="ja-JP" sz="2800" b="0" dirty="0"/>
+              <a:t>(</a:t>
+            </a:r>
+            <a:r>
+              <a:rPr kumimoji="1" lang="ja-JP" altLang="en-US" sz="2800" b="0" dirty="0"/>
+              <a:t>他プログラマーも問題なく流用・メンテナンスできる</a:t>
+            </a:r>
+            <a:r>
+              <a:rPr kumimoji="1" lang="en-US" altLang="ja-JP" sz="2800" b="0" dirty="0"/>
+              <a:t>)</a:t>
+            </a:r>
           </a:p>
           <a:p>
             <a:pPr marL="0" indent="0">
               <a:buNone/>
             </a:pPr>
             <a:endParaRPr kumimoji="1" lang="en-US" altLang="ja-JP" sz="2800" b="0" dirty="0"/>
+          </a:p>
+        </p:txBody>
+      </p:sp>
+      <p:sp>
+        <p:nvSpPr>
+          <p:cNvPr id="8" name="テキスト ボックス 7">
+            <a:extLst>
+              <a:ext uri="{FF2B5EF4-FFF2-40B4-BE49-F238E27FC236}">
+                <a16:creationId xmlns:a16="http://schemas.microsoft.com/office/drawing/2014/main" id="{6FDD60AB-FE4A-FACA-7555-E42A2B672619}"/>
+              </a:ext>
+            </a:extLst>
+          </p:cNvPr>
+          <p:cNvSpPr txBox="1"/>
+          <p:nvPr/>
+        </p:nvSpPr>
+        <p:spPr>
+          <a:xfrm>
+            <a:off x="3503295" y="2476853"/>
+            <a:ext cx="4669155" cy="523220"/>
+          </a:xfrm>
+          <a:prstGeom prst="rect">
+            <a:avLst/>
+          </a:prstGeom>
+          <a:noFill/>
+        </p:spPr>
+        <p:txBody>
+          <a:bodyPr wrap="square">
+            <a:spAutoFit/>
+          </a:bodyPr>
+          <a:lstStyle/>
+          <a:p>
+            <a:pPr marL="0" indent="0">
+              <a:buNone/>
+            </a:pPr>
+            <a:r>
+              <a:rPr kumimoji="1" lang="ja-JP" altLang="en-US" sz="2800" b="0" dirty="0">
+                <a:latin typeface="Meiryo UI" panose="020B0604030504040204" pitchFamily="50" charset="-128"/>
+                <a:ea typeface="Meiryo UI" panose="020B0604030504040204" pitchFamily="50" charset="-128"/>
+              </a:rPr>
+              <a:t>頑健なプログラムを書きたい！</a:t>
+            </a:r>
+            <a:endParaRPr kumimoji="1" lang="en-US" altLang="ja-JP" sz="2800" b="0" dirty="0">
+              <a:latin typeface="Meiryo UI" panose="020B0604030504040204" pitchFamily="50" charset="-128"/>
+              <a:ea typeface="Meiryo UI" panose="020B0604030504040204" pitchFamily="50" charset="-128"/>
+            </a:endParaRPr>
+          </a:p>
+        </p:txBody>
+      </p:sp>
+      <p:sp>
+        <p:nvSpPr>
+          <p:cNvPr id="9" name="矢印: 下 8">
+            <a:extLst>
+              <a:ext uri="{FF2B5EF4-FFF2-40B4-BE49-F238E27FC236}">
+                <a16:creationId xmlns:a16="http://schemas.microsoft.com/office/drawing/2014/main" id="{8734B0A8-56EF-B619-2393-D2804274C2BC}"/>
+              </a:ext>
+            </a:extLst>
+          </p:cNvPr>
+          <p:cNvSpPr/>
+          <p:nvPr/>
+        </p:nvSpPr>
+        <p:spPr>
+          <a:xfrm>
+            <a:off x="5234940" y="1930773"/>
+            <a:ext cx="484632" cy="523220"/>
+          </a:xfrm>
+          <a:prstGeom prst="downArrow">
+            <a:avLst/>
+          </a:prstGeom>
+          <a:solidFill>
+            <a:schemeClr val="accent1">
+              <a:lumMod val="40000"/>
+              <a:lumOff val="60000"/>
+            </a:schemeClr>
+          </a:solidFill>
+          <a:ln>
+            <a:noFill/>
+          </a:ln>
+        </p:spPr>
+        <p:style>
+          <a:lnRef idx="2">
+            <a:schemeClr val="accent1">
+              <a:shade val="15000"/>
+            </a:schemeClr>
+          </a:lnRef>
+          <a:fillRef idx="1">
+            <a:schemeClr val="accent1"/>
+          </a:fillRef>
+          <a:effectRef idx="0">
+            <a:schemeClr val="accent1"/>
+          </a:effectRef>
+          <a:fontRef idx="minor">
+            <a:schemeClr val="lt1"/>
+          </a:fontRef>
+        </p:style>
+        <p:txBody>
+          <a:bodyPr rtlCol="0" anchor="ctr"/>
+          <a:lstStyle/>
+          <a:p>
+            <a:pPr algn="ctr"/>
+            <a:endParaRPr kumimoji="1" lang="ja-JP" altLang="en-US"/>
           </a:p>
         </p:txBody>
       </p:sp>
@@ -14574,7 +14695,7 @@
         </p:nvSpPr>
         <p:spPr>
           <a:xfrm>
-            <a:off x="496886" y="2319623"/>
+            <a:off x="496886" y="2399633"/>
             <a:ext cx="4722814" cy="1125114"/>
           </a:xfrm>
           <a:prstGeom prst="rect">
@@ -14631,7 +14752,7 @@
         </p:nvSpPr>
         <p:spPr>
           <a:xfrm>
-            <a:off x="496885" y="2361938"/>
+            <a:off x="496885" y="2441948"/>
             <a:ext cx="4722815" cy="1015663"/>
           </a:xfrm>
           <a:prstGeom prst="rect">
@@ -14747,7 +14868,7 @@
         </p:nvSpPr>
         <p:spPr>
           <a:xfrm>
-            <a:off x="496885" y="3711446"/>
+            <a:off x="496885" y="3791456"/>
             <a:ext cx="4722814" cy="1495553"/>
           </a:xfrm>
           <a:prstGeom prst="rect">
@@ -14804,7 +14925,7 @@
         </p:nvSpPr>
         <p:spPr>
           <a:xfrm>
-            <a:off x="496884" y="3753762"/>
+            <a:off x="496884" y="3833772"/>
             <a:ext cx="4722815" cy="1323439"/>
           </a:xfrm>
           <a:prstGeom prst="rect">
@@ -14950,7 +15071,7 @@
         </p:blipFill>
         <p:spPr>
           <a:xfrm>
-            <a:off x="5566819" y="2264142"/>
+            <a:off x="5566819" y="2344152"/>
             <a:ext cx="7792537" cy="1200318"/>
           </a:xfrm>
           <a:prstGeom prst="rect">
@@ -14980,7 +15101,7 @@
         </p:blipFill>
         <p:spPr>
           <a:xfrm>
-            <a:off x="5566819" y="3753762"/>
+            <a:off x="5566819" y="3833772"/>
             <a:ext cx="7478169" cy="1476581"/>
           </a:xfrm>
           <a:prstGeom prst="rect">
@@ -15255,10 +15376,7 @@
               <a:rPr kumimoji="1" lang="ja-JP" altLang="en-US" b="0" dirty="0"/>
               <a:t>を実行すると出力される作業パス</a:t>
             </a:r>
-            <a:r>
-              <a:rPr kumimoji="1" lang="en-US" altLang="ja-JP" b="0" dirty="0"/>
-              <a:t>)</a:t>
-            </a:r>
+            <a:endParaRPr kumimoji="1" lang="en-US" altLang="ja-JP" b="0" dirty="0"/>
           </a:p>
         </p:txBody>
       </p:sp>
@@ -17126,7 +17244,7 @@
           <p:nvPr>
             <p:extLst>
               <p:ext uri="{D42A27DB-BD31-4B8C-83A1-F6EECF244321}">
-                <p14:modId xmlns:p14="http://schemas.microsoft.com/office/powerpoint/2010/main" val="3387994204"/>
+                <p14:modId xmlns:p14="http://schemas.microsoft.com/office/powerpoint/2010/main" val="1340301154"/>
               </p:ext>
             </p:extLst>
           </p:nvPr>
@@ -17329,8 +17447,16 @@
                     <a:lstStyle/>
                     <a:p>
                       <a:r>
+                        <a:rPr kumimoji="1" lang="ja-JP" altLang="en-US" dirty="0">
+                          <a:solidFill>
+                            <a:srgbClr val="FF0000"/>
+                          </a:solidFill>
+                        </a:rPr>
+                        <a:t>警告をエラー扱い</a:t>
+                      </a:r>
+                      <a:r>
                         <a:rPr kumimoji="1" lang="ja-JP" altLang="en-US" dirty="0"/>
-                        <a:t>警告をエラー扱いにする</a:t>
+                        <a:t>にする</a:t>
                       </a:r>
                     </a:p>
                   </a:txBody>
@@ -20796,7 +20922,7 @@
         <p:spPr>
           <a:xfrm>
             <a:off x="496885" y="1426912"/>
-            <a:ext cx="13745207" cy="1446550"/>
+            <a:ext cx="13745207" cy="938719"/>
           </a:xfrm>
         </p:spPr>
         <p:txBody>
@@ -20842,17 +20968,7 @@
             </a:r>
             <a:r>
               <a:rPr kumimoji="1" lang="ja-JP" altLang="en-US" sz="2800" b="0" dirty="0"/>
-              <a:t>を</a:t>
-            </a:r>
-            <a:endParaRPr kumimoji="1" lang="en-US" altLang="ja-JP" sz="2800" b="0" dirty="0"/>
-          </a:p>
-          <a:p>
-            <a:pPr marL="0" indent="0">
-              <a:buNone/>
-            </a:pPr>
-            <a:r>
-              <a:rPr kumimoji="1" lang="ja-JP" altLang="en-US" sz="2800" b="0" dirty="0"/>
-              <a:t>行うことができる</a:t>
+              <a:t>が可能</a:t>
             </a:r>
             <a:endParaRPr kumimoji="1" lang="en-US" altLang="ja-JP" sz="2800" b="0" dirty="0"/>
           </a:p>
@@ -20872,7 +20988,7 @@
         </p:nvSpPr>
         <p:spPr>
           <a:xfrm>
-            <a:off x="496885" y="3175000"/>
+            <a:off x="496885" y="2740660"/>
             <a:ext cx="9790115" cy="2730500"/>
           </a:xfrm>
           <a:prstGeom prst="rect">
@@ -20929,7 +21045,7 @@
         </p:nvSpPr>
         <p:spPr>
           <a:xfrm>
-            <a:off x="496885" y="3175000"/>
+            <a:off x="496885" y="2740660"/>
             <a:ext cx="9790115" cy="2554545"/>
           </a:xfrm>
           <a:prstGeom prst="rect">
@@ -21461,7 +21577,7 @@
             </a:pPr>
             <a:r>
               <a:rPr kumimoji="1" lang="ja-JP" altLang="en-US" sz="2800" b="0" dirty="0"/>
-              <a:t>以下の内容は本発表のスコープ外とする</a:t>
+              <a:t>以下は本発表のスコープ外とする</a:t>
             </a:r>
             <a:endParaRPr kumimoji="1" lang="en-US" altLang="ja-JP" sz="2800" b="0" dirty="0"/>
           </a:p>
@@ -28180,10 +28296,17 @@
               <a:buNone/>
             </a:pPr>
             <a:r>
+              <a:rPr kumimoji="1" lang="en-US" altLang="ja-JP" sz="2800" b="0" dirty="0"/>
+              <a:t>(</a:t>
+            </a:r>
+            <a:r>
               <a:rPr kumimoji="1" lang="ja-JP" altLang="en-US" sz="2800" b="0" dirty="0"/>
-              <a:t>（インストールしているがロードしていないパッケージは判定されない）</a:t>
-            </a:r>
-            <a:endParaRPr kumimoji="1" lang="en-US" altLang="ja-JP" sz="2800" b="0" dirty="0"/>
+              <a:t>インストールしているがロードしていないパッケージは判定されない</a:t>
+            </a:r>
+            <a:r>
+              <a:rPr kumimoji="1" lang="en-US" altLang="ja-JP" sz="2800" b="0" dirty="0"/>
+              <a:t>)</a:t>
+            </a:r>
           </a:p>
           <a:p>
             <a:pPr marL="0" indent="0">
@@ -28422,7 +28545,15 @@
             </a:pPr>
             <a:r>
               <a:rPr kumimoji="1" lang="ja-JP" altLang="en-US" sz="2800" b="0" dirty="0"/>
-              <a:t>標準パッケージを頑健なコーディングについて、検討した内容を紹介した</a:t>
+              <a:t>標準パッケージの頑健なコーディング</a:t>
+            </a:r>
+            <a:r>
+              <a:rPr kumimoji="1" lang="ja-JP" altLang="en-US" sz="2800" b="0"/>
+              <a:t>について検討</a:t>
+            </a:r>
+            <a:r>
+              <a:rPr kumimoji="1" lang="ja-JP" altLang="en-US" sz="2800" b="0" dirty="0"/>
+              <a:t>した</a:t>
             </a:r>
             <a:endParaRPr kumimoji="1" lang="en-US" altLang="ja-JP" sz="2800" b="0" dirty="0"/>
           </a:p>
@@ -28983,7 +29114,7 @@
         <p:spPr>
           <a:xfrm>
             <a:off x="673249" y="4599871"/>
-            <a:ext cx="13058476" cy="1954381"/>
+            <a:ext cx="13058476" cy="1446550"/>
           </a:xfrm>
         </p:spPr>
         <p:txBody>
@@ -28993,10 +29124,6 @@
             <a:pPr marL="0" indent="0">
               <a:buNone/>
             </a:pPr>
-            <a:r>
-              <a:rPr kumimoji="1" lang="ja-JP" altLang="en-US" sz="2800" b="0" dirty="0"/>
-              <a:t>行が演算子で終わっていると式は完結していないとみなされる</a:t>
-            </a:r>
             <a:endParaRPr kumimoji="1" lang="en-US" altLang="ja-JP" sz="2800" b="0" dirty="0"/>
           </a:p>
           <a:p>
@@ -29005,7 +29132,7 @@
             </a:pPr>
             <a:r>
               <a:rPr kumimoji="1" lang="ja-JP" altLang="en-US" sz="2800" b="0" dirty="0"/>
-              <a:t>→基本的に不要な改行はすべきではないが、</a:t>
+              <a:t>基本的に不要な改行はすべきではないが、</a:t>
             </a:r>
             <a:endParaRPr kumimoji="1" lang="en-US" altLang="ja-JP" sz="2800" b="0" dirty="0"/>
           </a:p>
@@ -29015,29 +29142,7 @@
             </a:pPr>
             <a:r>
               <a:rPr kumimoji="1" lang="ja-JP" altLang="en-US" sz="2800" b="0" dirty="0"/>
-              <a:t>　 可読性の観点などから式の途中で改行する場合は注意　</a:t>
-            </a:r>
-            <a:endParaRPr kumimoji="1" lang="en-US" altLang="ja-JP" sz="2800" b="0" dirty="0"/>
-          </a:p>
-          <a:p>
-            <a:pPr marL="0" indent="0">
-              <a:buNone/>
-            </a:pPr>
-            <a:r>
-              <a:rPr kumimoji="1" lang="en-US" altLang="ja-JP" sz="2800" b="0" dirty="0"/>
-              <a:t> </a:t>
-            </a:r>
-            <a:r>
-              <a:rPr kumimoji="1" lang="ja-JP" altLang="en-US" sz="2800" b="0" dirty="0"/>
-              <a:t>（</a:t>
-            </a:r>
-            <a:r>
-              <a:rPr kumimoji="1" lang="en-US" altLang="ja-JP" sz="2800" b="0" dirty="0"/>
-              <a:t>SAS</a:t>
-            </a:r>
-            <a:r>
-              <a:rPr kumimoji="1" lang="ja-JP" altLang="en-US" sz="2800" b="0" dirty="0"/>
-              <a:t>ではセミコロンで式が終わったか判断するのでこのようなことは起こらない）</a:t>
+              <a:t>可読性の観点などから式の途中で改行する場合は注意　</a:t>
             </a:r>
             <a:endParaRPr kumimoji="1" lang="en-US" altLang="ja-JP" sz="2800" b="0" dirty="0"/>
           </a:p>
@@ -29057,7 +29162,7 @@
         </p:nvSpPr>
         <p:spPr>
           <a:xfrm>
-            <a:off x="2871787" y="2277781"/>
+            <a:off x="2871787" y="2654971"/>
             <a:ext cx="2043113" cy="938719"/>
           </a:xfrm>
           <a:prstGeom prst="rect">
@@ -29114,7 +29219,7 @@
         </p:nvSpPr>
         <p:spPr>
           <a:xfrm>
-            <a:off x="2897186" y="2348739"/>
+            <a:off x="2897186" y="2725929"/>
             <a:ext cx="2132014" cy="707886"/>
           </a:xfrm>
           <a:prstGeom prst="rect">
@@ -29216,7 +29321,7 @@
         </p:nvSpPr>
         <p:spPr>
           <a:xfrm>
-            <a:off x="8243887" y="2277781"/>
+            <a:off x="8243887" y="2654971"/>
             <a:ext cx="2259014" cy="938719"/>
           </a:xfrm>
           <a:prstGeom prst="rect">
@@ -29273,7 +29378,7 @@
         </p:nvSpPr>
         <p:spPr>
           <a:xfrm>
-            <a:off x="8269286" y="2348739"/>
+            <a:off x="8269286" y="2725929"/>
             <a:ext cx="2538413" cy="707886"/>
           </a:xfrm>
           <a:prstGeom prst="rect">
@@ -29377,8 +29482,8 @@
         </p:nvSpPr>
         <p:spPr>
           <a:xfrm>
-            <a:off x="522287" y="1406985"/>
-            <a:ext cx="6970564" cy="430887"/>
+            <a:off x="522286" y="1406985"/>
+            <a:ext cx="9318943" cy="1446550"/>
           </a:xfrm>
           <a:prstGeom prst="rect">
             <a:avLst/>
@@ -29493,6 +29598,23 @@
             </a:r>
             <a:endParaRPr kumimoji="1" lang="en-US" altLang="ja-JP" sz="2800" b="0" dirty="0"/>
           </a:p>
+          <a:p>
+            <a:pPr marL="0" indent="0">
+              <a:buNone/>
+            </a:pPr>
+            <a:r>
+              <a:rPr kumimoji="1" lang="ja-JP" altLang="en-US" sz="2800" b="0" dirty="0"/>
+              <a:t>行が演算子で終わっている場合、式は完結していないとみなされる</a:t>
+            </a:r>
+            <a:endParaRPr kumimoji="1" lang="en-US" altLang="ja-JP" sz="2800" b="0" dirty="0"/>
+          </a:p>
+          <a:p>
+            <a:pPr marL="0" indent="0">
+              <a:buFont typeface="Arial" panose="020B0604020202020204" pitchFamily="34" charset="0"/>
+              <a:buNone/>
+            </a:pPr>
+            <a:endParaRPr kumimoji="1" lang="en-US" altLang="ja-JP" sz="2800" b="0" dirty="0"/>
+          </a:p>
         </p:txBody>
       </p:sp>
       <p:sp>
@@ -29511,7 +29633,7 @@
         </p:nvSpPr>
         <p:spPr>
           <a:xfrm>
-            <a:off x="814536" y="3381118"/>
+            <a:off x="814536" y="3758308"/>
             <a:ext cx="6970564" cy="692497"/>
           </a:xfrm>
           <a:prstGeom prst="rect">
@@ -29700,7 +29822,7 @@
         </p:nvSpPr>
         <p:spPr>
           <a:xfrm>
-            <a:off x="7805810" y="3381118"/>
+            <a:off x="7805810" y="3758308"/>
             <a:ext cx="3465364" cy="307777"/>
           </a:xfrm>
           <a:prstGeom prst="rect">
@@ -31042,7 +31164,7 @@
             </a:pPr>
             <a:r>
               <a:rPr kumimoji="1" lang="ja-JP" altLang="en-US" sz="2800" b="0" dirty="0"/>
-              <a:t>（例）</a:t>
+              <a:t>　例）</a:t>
             </a:r>
             <a:r>
               <a:rPr kumimoji="1" lang="en-US" altLang="ja-JP" sz="2800" b="0" dirty="0"/>
@@ -31255,7 +31377,7 @@
             </a:r>
             <a:r>
               <a:rPr kumimoji="1" lang="ja-JP" altLang="en-US" sz="2800" b="0" dirty="0"/>
-              <a:t>の有無を確認する</a:t>
+              <a:t>の有無を確認</a:t>
             </a:r>
             <a:endParaRPr kumimoji="1" lang="en-US" altLang="ja-JP" sz="2800" b="0" dirty="0"/>
           </a:p>
@@ -31882,7 +32004,7 @@
         <p:spPr>
           <a:xfrm>
             <a:off x="719999" y="1328058"/>
-            <a:ext cx="12933371" cy="1954381"/>
+            <a:ext cx="12933371" cy="2462213"/>
           </a:xfrm>
         </p:spPr>
         <p:txBody>
@@ -31898,7 +32020,17 @@
             </a:r>
             <a:r>
               <a:rPr kumimoji="1" lang="ja-JP" altLang="en-US" sz="2800" b="0" dirty="0"/>
-              <a:t>は何もないことを示すものであり、解析時に意図しない挙動を起こしうる</a:t>
+              <a:t>は何もないことを示すもの</a:t>
+            </a:r>
+            <a:endParaRPr kumimoji="1" lang="en-US" altLang="ja-JP" sz="2800" b="0" dirty="0"/>
+          </a:p>
+          <a:p>
+            <a:pPr marL="0" indent="0">
+              <a:buNone/>
+            </a:pPr>
+            <a:r>
+              <a:rPr kumimoji="1" lang="ja-JP" altLang="en-US" sz="2800" b="0" dirty="0"/>
+              <a:t>解析時に意図しない挙動を起こしうる</a:t>
             </a:r>
             <a:endParaRPr kumimoji="1" lang="en-US" altLang="ja-JP" sz="2800" b="0" dirty="0"/>
           </a:p>
@@ -31968,7 +32100,7 @@
         </p:nvSpPr>
         <p:spPr>
           <a:xfrm>
-            <a:off x="719999" y="3714379"/>
+            <a:off x="719999" y="4045849"/>
             <a:ext cx="7931767" cy="3077940"/>
           </a:xfrm>
           <a:prstGeom prst="rect">
@@ -32025,7 +32157,7 @@
         </p:nvSpPr>
         <p:spPr>
           <a:xfrm>
-            <a:off x="820879" y="3783627"/>
+            <a:off x="820879" y="4115097"/>
             <a:ext cx="7830887" cy="2862322"/>
           </a:xfrm>
           <a:prstGeom prst="rect">
@@ -32349,7 +32481,7 @@
         </p:blipFill>
         <p:spPr>
           <a:xfrm>
-            <a:off x="8854966" y="5665776"/>
+            <a:off x="8854966" y="5997246"/>
             <a:ext cx="2460734" cy="980173"/>
           </a:xfrm>
           <a:prstGeom prst="rect">
@@ -32379,7 +32511,7 @@
         </p:blipFill>
         <p:spPr>
           <a:xfrm>
-            <a:off x="8854966" y="3714379"/>
+            <a:off x="8854966" y="4045849"/>
             <a:ext cx="1801054" cy="1074938"/>
           </a:xfrm>
           <a:prstGeom prst="rect">
